--- a/images/Presentation1.pptx
+++ b/images/Presentation1.pptx
@@ -6,10 +6,14 @@
   </p:sldMasterIdLst>
   <p:sldIdLst>
     <p:sldId id="256" r:id="rId2"/>
-    <p:sldId id="259" r:id="rId3"/>
-    <p:sldId id="257" r:id="rId4"/>
-    <p:sldId id="258" r:id="rId5"/>
-    <p:sldId id="260" r:id="rId6"/>
+    <p:sldId id="261" r:id="rId3"/>
+    <p:sldId id="259" r:id="rId4"/>
+    <p:sldId id="262" r:id="rId5"/>
+    <p:sldId id="257" r:id="rId6"/>
+    <p:sldId id="263" r:id="rId7"/>
+    <p:sldId id="258" r:id="rId8"/>
+    <p:sldId id="264" r:id="rId9"/>
+    <p:sldId id="260" r:id="rId10"/>
   </p:sldIdLst>
   <p:sldSz cx="12192000" cy="6858000"/>
   <p:notesSz cx="6858000" cy="9144000"/>
@@ -265,7 +269,7 @@
           <a:p>
             <a:fld id="{1E794A6F-6913-4641-A2C2-00E236F4867C}" type="datetimeFigureOut">
               <a:rPr lang="en-IN" smtClean="0"/>
-              <a:t>28-09-2022</a:t>
+              <a:t>05-05-2023</a:t>
             </a:fld>
             <a:endParaRPr lang="en-IN"/>
           </a:p>
@@ -465,7 +469,7 @@
           <a:p>
             <a:fld id="{1E794A6F-6913-4641-A2C2-00E236F4867C}" type="datetimeFigureOut">
               <a:rPr lang="en-IN" smtClean="0"/>
-              <a:t>28-09-2022</a:t>
+              <a:t>05-05-2023</a:t>
             </a:fld>
             <a:endParaRPr lang="en-IN"/>
           </a:p>
@@ -675,7 +679,7 @@
           <a:p>
             <a:fld id="{1E794A6F-6913-4641-A2C2-00E236F4867C}" type="datetimeFigureOut">
               <a:rPr lang="en-IN" smtClean="0"/>
-              <a:t>28-09-2022</a:t>
+              <a:t>05-05-2023</a:t>
             </a:fld>
             <a:endParaRPr lang="en-IN"/>
           </a:p>
@@ -875,7 +879,7 @@
           <a:p>
             <a:fld id="{1E794A6F-6913-4641-A2C2-00E236F4867C}" type="datetimeFigureOut">
               <a:rPr lang="en-IN" smtClean="0"/>
-              <a:t>28-09-2022</a:t>
+              <a:t>05-05-2023</a:t>
             </a:fld>
             <a:endParaRPr lang="en-IN"/>
           </a:p>
@@ -1151,7 +1155,7 @@
           <a:p>
             <a:fld id="{1E794A6F-6913-4641-A2C2-00E236F4867C}" type="datetimeFigureOut">
               <a:rPr lang="en-IN" smtClean="0"/>
-              <a:t>28-09-2022</a:t>
+              <a:t>05-05-2023</a:t>
             </a:fld>
             <a:endParaRPr lang="en-IN"/>
           </a:p>
@@ -1419,7 +1423,7 @@
           <a:p>
             <a:fld id="{1E794A6F-6913-4641-A2C2-00E236F4867C}" type="datetimeFigureOut">
               <a:rPr lang="en-IN" smtClean="0"/>
-              <a:t>28-09-2022</a:t>
+              <a:t>05-05-2023</a:t>
             </a:fld>
             <a:endParaRPr lang="en-IN"/>
           </a:p>
@@ -1834,7 +1838,7 @@
           <a:p>
             <a:fld id="{1E794A6F-6913-4641-A2C2-00E236F4867C}" type="datetimeFigureOut">
               <a:rPr lang="en-IN" smtClean="0"/>
-              <a:t>28-09-2022</a:t>
+              <a:t>05-05-2023</a:t>
             </a:fld>
             <a:endParaRPr lang="en-IN"/>
           </a:p>
@@ -1976,7 +1980,7 @@
           <a:p>
             <a:fld id="{1E794A6F-6913-4641-A2C2-00E236F4867C}" type="datetimeFigureOut">
               <a:rPr lang="en-IN" smtClean="0"/>
-              <a:t>28-09-2022</a:t>
+              <a:t>05-05-2023</a:t>
             </a:fld>
             <a:endParaRPr lang="en-IN"/>
           </a:p>
@@ -2089,7 +2093,7 @@
           <a:p>
             <a:fld id="{1E794A6F-6913-4641-A2C2-00E236F4867C}" type="datetimeFigureOut">
               <a:rPr lang="en-IN" smtClean="0"/>
-              <a:t>28-09-2022</a:t>
+              <a:t>05-05-2023</a:t>
             </a:fld>
             <a:endParaRPr lang="en-IN"/>
           </a:p>
@@ -2402,7 +2406,7 @@
           <a:p>
             <a:fld id="{1E794A6F-6913-4641-A2C2-00E236F4867C}" type="datetimeFigureOut">
               <a:rPr lang="en-IN" smtClean="0"/>
-              <a:t>28-09-2022</a:t>
+              <a:t>05-05-2023</a:t>
             </a:fld>
             <a:endParaRPr lang="en-IN"/>
           </a:p>
@@ -2691,7 +2695,7 @@
           <a:p>
             <a:fld id="{1E794A6F-6913-4641-A2C2-00E236F4867C}" type="datetimeFigureOut">
               <a:rPr lang="en-IN" smtClean="0"/>
-              <a:t>28-09-2022</a:t>
+              <a:t>05-05-2023</a:t>
             </a:fld>
             <a:endParaRPr lang="en-IN"/>
           </a:p>
@@ -2769,36 +2773,9 @@
   <p:cSld>
     <p:bg>
       <p:bgPr>
-        <a:gradFill flip="none" rotWithShape="1">
-          <a:gsLst>
-            <a:gs pos="0">
-              <a:schemeClr val="accent4">
-                <a:lumMod val="5000"/>
-                <a:lumOff val="95000"/>
-              </a:schemeClr>
-            </a:gs>
-            <a:gs pos="74000">
-              <a:schemeClr val="accent4">
-                <a:lumMod val="45000"/>
-                <a:lumOff val="55000"/>
-              </a:schemeClr>
-            </a:gs>
-            <a:gs pos="83000">
-              <a:schemeClr val="accent4">
-                <a:lumMod val="45000"/>
-                <a:lumOff val="55000"/>
-              </a:schemeClr>
-            </a:gs>
-            <a:gs pos="100000">
-              <a:schemeClr val="accent4">
-                <a:lumMod val="30000"/>
-                <a:lumOff val="70000"/>
-              </a:schemeClr>
-            </a:gs>
-          </a:gsLst>
-          <a:lin ang="8100000" scaled="1"/>
-          <a:tileRect/>
-        </a:gradFill>
+        <a:solidFill>
+          <a:schemeClr val="bg1"/>
+        </a:solidFill>
         <a:effectLst/>
       </p:bgPr>
     </p:bg>
@@ -2964,7 +2941,7 @@
           <a:p>
             <a:fld id="{1E794A6F-6913-4641-A2C2-00E236F4867C}" type="datetimeFigureOut">
               <a:rPr lang="en-IN" smtClean="0"/>
-              <a:t>28-09-2022</a:t>
+              <a:t>05-05-2023</a:t>
             </a:fld>
             <a:endParaRPr lang="en-IN"/>
           </a:p>
@@ -3465,6 +3442,137 @@
       </p:grpSpPr>
       <p:pic>
         <p:nvPicPr>
+          <p:cNvPr id="5" name="Picture 4" descr="Graphical user interface&#10;&#10;Description automatically generated">
+            <a:extLst>
+              <a:ext uri="{FF2B5EF4-FFF2-40B4-BE49-F238E27FC236}">
+                <a16:creationId xmlns:a16="http://schemas.microsoft.com/office/drawing/2014/main" id="{4ACB2F06-2BA1-4C14-BD72-8B81881C95B9}"/>
+              </a:ext>
+            </a:extLst>
+          </p:cNvPr>
+          <p:cNvPicPr preferRelativeResize="0">
+            <a:picLocks/>
+          </p:cNvPicPr>
+          <p:nvPr/>
+        </p:nvPicPr>
+        <p:blipFill>
+          <a:blip r:embed="rId2">
+            <a:extLst>
+              <a:ext uri="{28A0092B-C50C-407E-A947-70E740481C1C}">
+                <a14:useLocalDpi xmlns:a14="http://schemas.microsoft.com/office/drawing/2010/main" val="0"/>
+              </a:ext>
+            </a:extLst>
+          </a:blip>
+          <a:stretch>
+            <a:fillRect/>
+          </a:stretch>
+        </p:blipFill>
+        <p:spPr>
+          <a:xfrm>
+            <a:off x="1179075" y="862594"/>
+            <a:ext cx="7920000" cy="4320000"/>
+          </a:xfrm>
+          <a:prstGeom prst="rect">
+            <a:avLst/>
+          </a:prstGeom>
+          <a:solidFill>
+            <a:srgbClr val="FFFFFF">
+              <a:shade val="85000"/>
+            </a:srgbClr>
+          </a:solidFill>
+          <a:ln w="88900" cap="sq">
+            <a:solidFill>
+              <a:srgbClr val="FFFFFF"/>
+            </a:solidFill>
+            <a:miter lim="800000"/>
+          </a:ln>
+          <a:effectLst>
+            <a:outerShdw blurRad="55000" dist="18000" dir="5400000" algn="tl" rotWithShape="0">
+              <a:srgbClr val="000000">
+                <a:alpha val="40000"/>
+              </a:srgbClr>
+            </a:outerShdw>
+          </a:effectLst>
+          <a:scene3d>
+            <a:camera prst="orthographicFront"/>
+            <a:lightRig rig="twoPt" dir="t">
+              <a:rot lat="0" lon="0" rev="7200000"/>
+            </a:lightRig>
+          </a:scene3d>
+          <a:sp3d>
+            <a:bevelT w="25400" h="19050"/>
+            <a:contourClr>
+              <a:srgbClr val="FFFFFF"/>
+            </a:contourClr>
+          </a:sp3d>
+        </p:spPr>
+      </p:pic>
+      <p:sp>
+        <p:nvSpPr>
+          <p:cNvPr id="2" name="TextBox 1">
+            <a:extLst>
+              <a:ext uri="{FF2B5EF4-FFF2-40B4-BE49-F238E27FC236}">
+                <a16:creationId xmlns:a16="http://schemas.microsoft.com/office/drawing/2014/main" id="{FA1493FC-3704-00BC-A03E-64A75528505C}"/>
+              </a:ext>
+            </a:extLst>
+          </p:cNvPr>
+          <p:cNvSpPr txBox="1"/>
+          <p:nvPr/>
+        </p:nvSpPr>
+        <p:spPr>
+          <a:xfrm>
+            <a:off x="4901938" y="5458120"/>
+            <a:ext cx="1424493" cy="369332"/>
+          </a:xfrm>
+          <a:prstGeom prst="rect">
+            <a:avLst/>
+          </a:prstGeom>
+          <a:noFill/>
+        </p:spPr>
+        <p:txBody>
+          <a:bodyPr wrap="none" rtlCol="0">
+            <a:spAutoFit/>
+          </a:bodyPr>
+          <a:lstStyle/>
+          <a:p>
+            <a:r>
+              <a:rPr lang="en-IN" dirty="0"/>
+              <a:t>IDEA-INSPIRE</a:t>
+            </a:r>
+          </a:p>
+        </p:txBody>
+      </p:sp>
+    </p:spTree>
+    <p:extLst>
+      <p:ext uri="{BB962C8B-B14F-4D97-AF65-F5344CB8AC3E}">
+        <p14:creationId xmlns:p14="http://schemas.microsoft.com/office/powerpoint/2010/main" val="3647908418"/>
+      </p:ext>
+    </p:extLst>
+  </p:cSld>
+  <p:clrMapOvr>
+    <a:masterClrMapping/>
+  </p:clrMapOvr>
+</p:sld>
+</file>
+
+<file path=ppt/slides/slide3.xml><?xml version="1.0" encoding="utf-8"?>
+<p:sld xmlns:a="http://schemas.openxmlformats.org/drawingml/2006/main" xmlns:r="http://schemas.openxmlformats.org/officeDocument/2006/relationships" xmlns:p="http://schemas.openxmlformats.org/presentationml/2006/main">
+  <p:cSld>
+    <p:spTree>
+      <p:nvGrpSpPr>
+        <p:cNvPr id="1" name=""/>
+        <p:cNvGrpSpPr/>
+        <p:nvPr/>
+      </p:nvGrpSpPr>
+      <p:grpSpPr>
+        <a:xfrm>
+          <a:off x="0" y="0"/>
+          <a:ext cx="0" cy="0"/>
+          <a:chOff x="0" y="0"/>
+          <a:chExt cx="0" cy="0"/>
+        </a:xfrm>
+      </p:grpSpPr>
+      <p:pic>
+        <p:nvPicPr>
           <p:cNvPr id="5" name="Picture 4">
             <a:extLst>
               <a:ext uri="{FF2B5EF4-FFF2-40B4-BE49-F238E27FC236}">
@@ -3527,7 +3635,102 @@
 </p:sld>
 </file>
 
-<file path=ppt/slides/slide3.xml><?xml version="1.0" encoding="utf-8"?>
+<file path=ppt/slides/slide4.xml><?xml version="1.0" encoding="utf-8"?>
+<p:sld xmlns:a="http://schemas.openxmlformats.org/drawingml/2006/main" xmlns:r="http://schemas.openxmlformats.org/officeDocument/2006/relationships" xmlns:p="http://schemas.openxmlformats.org/presentationml/2006/main">
+  <p:cSld>
+    <p:spTree>
+      <p:nvGrpSpPr>
+        <p:cNvPr id="1" name=""/>
+        <p:cNvGrpSpPr/>
+        <p:nvPr/>
+      </p:nvGrpSpPr>
+      <p:grpSpPr>
+        <a:xfrm>
+          <a:off x="0" y="0"/>
+          <a:ext cx="0" cy="0"/>
+          <a:chOff x="0" y="0"/>
+          <a:chExt cx="0" cy="0"/>
+        </a:xfrm>
+      </p:grpSpPr>
+      <p:pic>
+        <p:nvPicPr>
+          <p:cNvPr id="5" name="Picture 4">
+            <a:extLst>
+              <a:ext uri="{FF2B5EF4-FFF2-40B4-BE49-F238E27FC236}">
+                <a16:creationId xmlns:a16="http://schemas.microsoft.com/office/drawing/2014/main" id="{4ACB2F06-2BA1-4C14-BD72-8B81881C95B9}"/>
+              </a:ext>
+            </a:extLst>
+          </p:cNvPr>
+          <p:cNvPicPr preferRelativeResize="0">
+            <a:picLocks/>
+          </p:cNvPicPr>
+          <p:nvPr/>
+        </p:nvPicPr>
+        <p:blipFill>
+          <a:blip r:embed="rId2">
+            <a:extLst>
+              <a:ext uri="{28A0092B-C50C-407E-A947-70E740481C1C}">
+                <a14:useLocalDpi xmlns:a14="http://schemas.microsoft.com/office/drawing/2010/main" val="0"/>
+              </a:ext>
+            </a:extLst>
+          </a:blip>
+          <a:srcRect/>
+          <a:stretch/>
+        </p:blipFill>
+        <p:spPr>
+          <a:xfrm>
+            <a:off x="1036366" y="694498"/>
+            <a:ext cx="7920000" cy="4320000"/>
+          </a:xfrm>
+          <a:prstGeom prst="rect">
+            <a:avLst/>
+          </a:prstGeom>
+          <a:solidFill>
+            <a:srgbClr val="FFFFFF">
+              <a:shade val="85000"/>
+            </a:srgbClr>
+          </a:solidFill>
+          <a:ln w="88900" cap="sq">
+            <a:solidFill>
+              <a:srgbClr val="FFFFFF"/>
+            </a:solidFill>
+            <a:miter lim="800000"/>
+          </a:ln>
+          <a:effectLst>
+            <a:outerShdw blurRad="55000" dist="18000" dir="5400000" algn="tl" rotWithShape="0">
+              <a:srgbClr val="000000">
+                <a:alpha val="40000"/>
+              </a:srgbClr>
+            </a:outerShdw>
+          </a:effectLst>
+          <a:scene3d>
+            <a:camera prst="orthographicFront"/>
+            <a:lightRig rig="twoPt" dir="t">
+              <a:rot lat="0" lon="0" rev="7200000"/>
+            </a:lightRig>
+          </a:scene3d>
+          <a:sp3d>
+            <a:bevelT w="25400" h="19050"/>
+            <a:contourClr>
+              <a:srgbClr val="FFFFFF"/>
+            </a:contourClr>
+          </a:sp3d>
+        </p:spPr>
+      </p:pic>
+    </p:spTree>
+    <p:extLst>
+      <p:ext uri="{BB962C8B-B14F-4D97-AF65-F5344CB8AC3E}">
+        <p14:creationId xmlns:p14="http://schemas.microsoft.com/office/powerpoint/2010/main" val="2779182706"/>
+      </p:ext>
+    </p:extLst>
+  </p:cSld>
+  <p:clrMapOvr>
+    <a:masterClrMapping/>
+  </p:clrMapOvr>
+</p:sld>
+</file>
+
+<file path=ppt/slides/slide5.xml><?xml version="1.0" encoding="utf-8"?>
 <p:sld xmlns:a="http://schemas.openxmlformats.org/drawingml/2006/main" xmlns:r="http://schemas.openxmlformats.org/officeDocument/2006/relationships" xmlns:p="http://schemas.openxmlformats.org/presentationml/2006/main">
   <p:cSld>
     <p:spTree>
@@ -3608,7 +3811,141 @@
 </p:sld>
 </file>
 
-<file path=ppt/slides/slide4.xml><?xml version="1.0" encoding="utf-8"?>
+<file path=ppt/slides/slide6.xml><?xml version="1.0" encoding="utf-8"?>
+<p:sld xmlns:a="http://schemas.openxmlformats.org/drawingml/2006/main" xmlns:r="http://schemas.openxmlformats.org/officeDocument/2006/relationships" xmlns:p="http://schemas.openxmlformats.org/presentationml/2006/main">
+  <p:cSld>
+    <p:spTree>
+      <p:nvGrpSpPr>
+        <p:cNvPr id="1" name=""/>
+        <p:cNvGrpSpPr/>
+        <p:nvPr/>
+      </p:nvGrpSpPr>
+      <p:grpSpPr>
+        <a:xfrm>
+          <a:off x="0" y="0"/>
+          <a:ext cx="0" cy="0"/>
+          <a:chOff x="0" y="0"/>
+          <a:chExt cx="0" cy="0"/>
+        </a:xfrm>
+      </p:grpSpPr>
+      <p:pic>
+        <p:nvPicPr>
+          <p:cNvPr id="5" name="Picture 4">
+            <a:extLst>
+              <a:ext uri="{FF2B5EF4-FFF2-40B4-BE49-F238E27FC236}">
+                <a16:creationId xmlns:a16="http://schemas.microsoft.com/office/drawing/2014/main" id="{4ACB2F06-2BA1-4C14-BD72-8B81881C95B9}"/>
+              </a:ext>
+            </a:extLst>
+          </p:cNvPr>
+          <p:cNvPicPr preferRelativeResize="0">
+            <a:picLocks/>
+          </p:cNvPicPr>
+          <p:nvPr/>
+        </p:nvPicPr>
+        <p:blipFill>
+          <a:blip r:embed="rId2">
+            <a:extLst>
+              <a:ext uri="{28A0092B-C50C-407E-A947-70E740481C1C}">
+                <a14:useLocalDpi xmlns:a14="http://schemas.microsoft.com/office/drawing/2010/main" val="0"/>
+              </a:ext>
+            </a:extLst>
+          </a:blip>
+          <a:srcRect/>
+          <a:stretch/>
+        </p:blipFill>
+        <p:spPr>
+          <a:xfrm>
+            <a:off x="1064477" y="446937"/>
+            <a:ext cx="7920000" cy="4320000"/>
+          </a:xfrm>
+          <a:prstGeom prst="rect">
+            <a:avLst/>
+          </a:prstGeom>
+          <a:solidFill>
+            <a:srgbClr val="FFFFFF">
+              <a:shade val="85000"/>
+            </a:srgbClr>
+          </a:solidFill>
+          <a:ln w="88900" cap="sq">
+            <a:solidFill>
+              <a:srgbClr val="FFFFFF"/>
+            </a:solidFill>
+            <a:miter lim="800000"/>
+          </a:ln>
+          <a:effectLst>
+            <a:outerShdw blurRad="55000" dist="18000" dir="5400000" algn="tl" rotWithShape="0">
+              <a:srgbClr val="000000">
+                <a:alpha val="40000"/>
+              </a:srgbClr>
+            </a:outerShdw>
+          </a:effectLst>
+          <a:scene3d>
+            <a:camera prst="orthographicFront"/>
+            <a:lightRig rig="twoPt" dir="t">
+              <a:rot lat="0" lon="0" rev="7200000"/>
+            </a:lightRig>
+          </a:scene3d>
+          <a:sp3d>
+            <a:bevelT w="25400" h="19050"/>
+            <a:contourClr>
+              <a:srgbClr val="FFFFFF"/>
+            </a:contourClr>
+          </a:sp3d>
+        </p:spPr>
+      </p:pic>
+      <p:sp>
+        <p:nvSpPr>
+          <p:cNvPr id="3" name="TextBox 2">
+            <a:extLst>
+              <a:ext uri="{FF2B5EF4-FFF2-40B4-BE49-F238E27FC236}">
+                <a16:creationId xmlns:a16="http://schemas.microsoft.com/office/drawing/2014/main" id="{2AE8BE37-F32A-3BB7-62D0-80ADCD0055E1}"/>
+              </a:ext>
+            </a:extLst>
+          </p:cNvPr>
+          <p:cNvSpPr txBox="1"/>
+          <p:nvPr/>
+        </p:nvSpPr>
+        <p:spPr>
+          <a:xfrm>
+            <a:off x="3839067" y="5320587"/>
+            <a:ext cx="1317395" cy="369332"/>
+          </a:xfrm>
+          <a:prstGeom prst="rect">
+            <a:avLst/>
+          </a:prstGeom>
+          <a:noFill/>
+        </p:spPr>
+        <p:txBody>
+          <a:bodyPr wrap="square">
+            <a:spAutoFit/>
+          </a:bodyPr>
+          <a:lstStyle/>
+          <a:p>
+            <a:r>
+              <a:rPr lang="en-IN" b="0" i="0" dirty="0" err="1">
+                <a:effectLst/>
+                <a:latin typeface="Arial" panose="020B0604020202020204" pitchFamily="34" charset="0"/>
+              </a:rPr>
+              <a:t>FuncSION</a:t>
+            </a:r>
+            <a:endParaRPr lang="en-IN" dirty="0"/>
+          </a:p>
+        </p:txBody>
+      </p:sp>
+    </p:spTree>
+    <p:extLst>
+      <p:ext uri="{BB962C8B-B14F-4D97-AF65-F5344CB8AC3E}">
+        <p14:creationId xmlns:p14="http://schemas.microsoft.com/office/powerpoint/2010/main" val="664936871"/>
+      </p:ext>
+    </p:extLst>
+  </p:cSld>
+  <p:clrMapOvr>
+    <a:masterClrMapping/>
+  </p:clrMapOvr>
+</p:sld>
+</file>
+
+<file path=ppt/slides/slide7.xml><?xml version="1.0" encoding="utf-8"?>
 <p:sld xmlns:a="http://schemas.openxmlformats.org/drawingml/2006/main" xmlns:r="http://schemas.openxmlformats.org/officeDocument/2006/relationships" xmlns:p="http://schemas.openxmlformats.org/presentationml/2006/main">
   <p:cSld>
     <p:spTree>
@@ -3689,7 +4026,141 @@
 </p:sld>
 </file>
 
-<file path=ppt/slides/slide5.xml><?xml version="1.0" encoding="utf-8"?>
+<file path=ppt/slides/slide8.xml><?xml version="1.0" encoding="utf-8"?>
+<p:sld xmlns:a="http://schemas.openxmlformats.org/drawingml/2006/main" xmlns:r="http://schemas.openxmlformats.org/officeDocument/2006/relationships" xmlns:p="http://schemas.openxmlformats.org/presentationml/2006/main">
+  <p:cSld>
+    <p:spTree>
+      <p:nvGrpSpPr>
+        <p:cNvPr id="1" name=""/>
+        <p:cNvGrpSpPr/>
+        <p:nvPr/>
+      </p:nvGrpSpPr>
+      <p:grpSpPr>
+        <a:xfrm>
+          <a:off x="0" y="0"/>
+          <a:ext cx="0" cy="0"/>
+          <a:chOff x="0" y="0"/>
+          <a:chExt cx="0" cy="0"/>
+        </a:xfrm>
+      </p:grpSpPr>
+      <p:pic>
+        <p:nvPicPr>
+          <p:cNvPr id="5" name="Picture 4">
+            <a:extLst>
+              <a:ext uri="{FF2B5EF4-FFF2-40B4-BE49-F238E27FC236}">
+                <a16:creationId xmlns:a16="http://schemas.microsoft.com/office/drawing/2014/main" id="{4ACB2F06-2BA1-4C14-BD72-8B81881C95B9}"/>
+              </a:ext>
+            </a:extLst>
+          </p:cNvPr>
+          <p:cNvPicPr preferRelativeResize="0">
+            <a:picLocks/>
+          </p:cNvPicPr>
+          <p:nvPr/>
+        </p:nvPicPr>
+        <p:blipFill>
+          <a:blip r:embed="rId2">
+            <a:extLst>
+              <a:ext uri="{28A0092B-C50C-407E-A947-70E740481C1C}">
+                <a14:useLocalDpi xmlns:a14="http://schemas.microsoft.com/office/drawing/2010/main" val="0"/>
+              </a:ext>
+            </a:extLst>
+          </a:blip>
+          <a:srcRect/>
+          <a:stretch/>
+        </p:blipFill>
+        <p:spPr>
+          <a:xfrm>
+            <a:off x="1169406" y="486053"/>
+            <a:ext cx="7920000" cy="4320000"/>
+          </a:xfrm>
+          <a:prstGeom prst="rect">
+            <a:avLst/>
+          </a:prstGeom>
+          <a:solidFill>
+            <a:srgbClr val="FFFFFF">
+              <a:shade val="85000"/>
+            </a:srgbClr>
+          </a:solidFill>
+          <a:ln w="88900" cap="sq">
+            <a:solidFill>
+              <a:srgbClr val="FFFFFF"/>
+            </a:solidFill>
+            <a:miter lim="800000"/>
+          </a:ln>
+          <a:effectLst>
+            <a:outerShdw blurRad="55000" dist="18000" dir="5400000" algn="tl" rotWithShape="0">
+              <a:srgbClr val="000000">
+                <a:alpha val="40000"/>
+              </a:srgbClr>
+            </a:outerShdw>
+          </a:effectLst>
+          <a:scene3d>
+            <a:camera prst="orthographicFront"/>
+            <a:lightRig rig="twoPt" dir="t">
+              <a:rot lat="0" lon="0" rev="7200000"/>
+            </a:lightRig>
+          </a:scene3d>
+          <a:sp3d>
+            <a:bevelT w="25400" h="19050"/>
+            <a:contourClr>
+              <a:srgbClr val="FFFFFF"/>
+            </a:contourClr>
+          </a:sp3d>
+        </p:spPr>
+      </p:pic>
+      <p:sp>
+        <p:nvSpPr>
+          <p:cNvPr id="2" name="TextBox 1">
+            <a:extLst>
+              <a:ext uri="{FF2B5EF4-FFF2-40B4-BE49-F238E27FC236}">
+                <a16:creationId xmlns:a16="http://schemas.microsoft.com/office/drawing/2014/main" id="{83CB9BB0-5520-D554-1BE6-B61019BDBDE7}"/>
+              </a:ext>
+            </a:extLst>
+          </p:cNvPr>
+          <p:cNvSpPr txBox="1"/>
+          <p:nvPr/>
+        </p:nvSpPr>
+        <p:spPr>
+          <a:xfrm>
+            <a:off x="3839067" y="5320587"/>
+            <a:ext cx="1317395" cy="369332"/>
+          </a:xfrm>
+          <a:prstGeom prst="rect">
+            <a:avLst/>
+          </a:prstGeom>
+          <a:noFill/>
+        </p:spPr>
+        <p:txBody>
+          <a:bodyPr wrap="square">
+            <a:spAutoFit/>
+          </a:bodyPr>
+          <a:lstStyle/>
+          <a:p>
+            <a:r>
+              <a:rPr lang="en-IN" b="0" i="0" dirty="0" err="1">
+                <a:effectLst/>
+                <a:latin typeface="Arial" panose="020B0604020202020204" pitchFamily="34" charset="0"/>
+              </a:rPr>
+              <a:t>InDeaTe</a:t>
+            </a:r>
+            <a:endParaRPr lang="en-IN" dirty="0"/>
+          </a:p>
+        </p:txBody>
+      </p:sp>
+    </p:spTree>
+    <p:extLst>
+      <p:ext uri="{BB962C8B-B14F-4D97-AF65-F5344CB8AC3E}">
+        <p14:creationId xmlns:p14="http://schemas.microsoft.com/office/powerpoint/2010/main" val="3907593603"/>
+      </p:ext>
+    </p:extLst>
+  </p:cSld>
+  <p:clrMapOvr>
+    <a:masterClrMapping/>
+  </p:clrMapOvr>
+</p:sld>
+</file>
+
+<file path=ppt/slides/slide9.xml><?xml version="1.0" encoding="utf-8"?>
 <p:sld xmlns:a="http://schemas.openxmlformats.org/drawingml/2006/main" xmlns:r="http://schemas.openxmlformats.org/officeDocument/2006/relationships" xmlns:p="http://schemas.openxmlformats.org/presentationml/2006/main">
   <p:cSld>
     <p:spTree>
